--- a/docs/AIVibe_Investor_Deck_2026-06.pptx
+++ b/docs/AIVibe_Investor_Deck_2026-06.pptx
@@ -213,7 +213,7 @@
           </c:val>
         </c:ser>
         <c:dLbls>
-          <c:numFmt formatCode="0.0" sourceLinked="0"/>
+          <c:numFmt formatCode="0.0&quot;×&quot;" sourceLinked="0"/>
           <c:txPr>
             <a:bodyPr/>
             <a:lstStyle/>
@@ -278,6 +278,7 @@
         <c:delete val="0"/>
         <c:axPos val="l"/>
         <c:majorGridlines/>
+        <c:numFmt formatCode="0&quot;×&quot;" sourceLinked="0"/>
         <c:majorTickMark val="out"/>
         <c:minorTickMark val="none"/>
         <c:tickLblPos val="nextTo"/>
@@ -334,7 +335,7 @@
               <c:strCache>
                 <c:ptCount val="1"/>
                 <c:pt idx="0">
-                  <c:v>Выручка, тыс ₽/мес</c:v>
+                  <c:v>Выручка</c:v>
                 </c:pt>
               </c:strCache>
             </c:strRef>
@@ -521,7 +522,7 @@
               <c:strCache>
                 <c:ptCount val="1"/>
                 <c:pt idx="0">
-                  <c:v>Затраты, тыс ₽/мес</c:v>
+                  <c:v>Затраты</c:v>
                 </c:pt>
               </c:strCache>
             </c:strRef>
@@ -531,6 +532,7 @@
               <a:solidFill>
                 <a:srgbClr val="9C3848"/>
               </a:solidFill>
+              <a:prstDash val="dash"/>
             </a:ln>
           </c:spPr>
           <c:marker>
@@ -742,6 +744,28 @@
         <c:delete val="0"/>
         <c:axPos val="l"/>
         <c:majorGridlines/>
+        <c:title>
+          <c:tx>
+            <c:rich>
+              <a:bodyPr/>
+              <a:lstStyle/>
+              <a:p>
+                <a:r>
+                  <a:rPr sz="1000" b="1">
+                    <a:solidFill>
+                      <a:srgbClr val="5A6472"/>
+                    </a:solidFill>
+                    <a:latin typeface="Cambria"/>
+                  </a:rPr>
+                  <a:t>тыс ₽ / мес</a:t>
+                </a:r>
+              </a:p>
+            </c:rich>
+          </c:tx>
+          <c:layout/>
+          <c:overlay val="0"/>
+        </c:title>
+        <c:numFmt formatCode="#,##0" sourceLinked="0"/>
         <c:majorTickMark val="out"/>
         <c:minorTickMark val="none"/>
         <c:tickLblPos val="nextTo"/>
@@ -15052,7 +15076,7 @@
                 </a:solidFill>
                 <a:latin typeface="Arial"/>
               </a:rPr>
-              <a:t>Значения — середины диапазонов из разбора; иллюстрация, не обещание.</a:t>
+              <a:t>× = во сколько раз пожизненная ценность клиента (LTV) покрывает стоимость привлечения (CAC); норма ≥ 3. Значения — середины диапазонов из разбора, иллюстрация, не обещание.</a:t>
             </a:r>
           </a:p>
         </p:txBody>
